--- a/templates/06-graduations-best-step.pptx
+++ b/templates/06-graduations-best-step.pptx
@@ -3399,7 +3399,7 @@
         <p:spPr>
           <a:xfrm>
             <a:off x="666750" y="5143500"/>
-            <a:ext cx="2857500" cy="381000"/>
+            <a:ext cx="5715000" cy="381000"/>
           </a:xfrm>
           <a:prstGeom prst="rect">
             <a:avLst/>

--- a/templates/06-graduations-best-step.pptx
+++ b/templates/06-graduations-best-step.pptx
@@ -3497,29 +3497,13 @@
               </a:lnSpc>
             </a:pPr>
             <a:r>
-              <a:rPr sz="14250" b="1">
+              <a:rPr sz="9300" b="1">
                 <a:solidFill>
                   <a:srgbClr val="E3A53B"/>
                 </a:solidFill>
                 <a:latin typeface="Montserrat"/>
               </a:rPr>
-              <a:t>GRADUA-</a:t>
-            </a:r>
-          </a:p>
-          <a:p>
-            <a:pPr algn="l">
-              <a:lnSpc>
-                <a:spcPct val="95000"/>
-              </a:lnSpc>
-            </a:pPr>
-            <a:r>
-              <a:rPr sz="14250" b="1">
-                <a:solidFill>
-                  <a:srgbClr val="E3A53B"/>
-                </a:solidFill>
-                <a:latin typeface="Montserrat"/>
-              </a:rPr>
-              <a:t>TION</a:t>
+              <a:t>GRADUATION</a:t>
             </a:r>
           </a:p>
         </p:txBody>
@@ -7371,8 +7355,8 @@
         </p:nvSpPr>
         <p:spPr>
           <a:xfrm>
-            <a:off x="666750" y="4000500"/>
-            <a:ext cx="8953500" cy="3143250"/>
+            <a:off x="666750" y="2857500"/>
+            <a:ext cx="8953500" cy="4095750"/>
           </a:xfrm>
           <a:prstGeom prst="rect">
             <a:avLst/>
@@ -7397,23 +7381,7 @@
                 </a:solidFill>
                 <a:latin typeface="Montserrat"/>
               </a:rPr>
-              <a:t>CONGRATU-</a:t>
-            </a:r>
-          </a:p>
-          <a:p>
-            <a:pPr algn="l">
-              <a:lnSpc>
-                <a:spcPct val="95000"/>
-              </a:lnSpc>
-            </a:pPr>
-            <a:r>
-              <a:rPr sz="9000" b="1">
-                <a:solidFill>
-                  <a:srgbClr val="FFFFFF"/>
-                </a:solidFill>
-                <a:latin typeface="Montserrat"/>
-              </a:rPr>
-              <a:t>LATIONS,</a:t>
+              <a:t>CONGRATS,</a:t>
             </a:r>
           </a:p>
           <a:p>
@@ -7442,7 +7410,7 @@
         </p:nvSpPr>
         <p:spPr>
           <a:xfrm>
-            <a:off x="666750" y="7239000"/>
+            <a:off x="666750" y="5749290"/>
             <a:ext cx="8953500" cy="1143000"/>
           </a:xfrm>
           <a:prstGeom prst="rect">
